--- a/guides/problems/navier-stokes/output/Navier_Stokes_Plain_Language_Brief_v1.0.0_EN.pptx
+++ b/guides/problems/navier-stokes/output/Navier_Stokes_Plain_Language_Brief_v1.0.0_EN.pptx
@@ -65,7 +65,7 @@
         <p:txBody>
           <a:bodyPr/>
           <a:p>
-            <a:fld id="{E5907942-D42F-4816-93BA-2F40AC274E08}" type="slidenum">
+            <a:fld id="{8CAE0E28-F0CF-428F-A6B1-DCDF94FC6FAB}" type="slidenum">
               <a:t>&lt;#&gt;</a:t>
             </a:fld>
           </a:p>
@@ -253,7 +253,7 @@
         <p:txBody>
           <a:bodyPr/>
           <a:p>
-            <a:fld id="{84AEB203-BB66-4D3F-BB60-7FF02F99221A}" type="slidenum">
+            <a:fld id="{216BB571-E0AA-49AA-A59D-BCDB464E6D60}" type="slidenum">
               <a:t>&lt;#&gt;</a:t>
             </a:fld>
           </a:p>
@@ -509,7 +509,7 @@
         <p:txBody>
           <a:bodyPr/>
           <a:p>
-            <a:fld id="{858DBE03-CA01-4343-AD1A-4F31702FE4F3}" type="slidenum">
+            <a:fld id="{DB19986D-4E72-49D7-869E-4B9E4B35A050}" type="slidenum">
               <a:t>&lt;#&gt;</a:t>
             </a:fld>
           </a:p>
@@ -833,7 +833,7 @@
         <p:txBody>
           <a:bodyPr/>
           <a:p>
-            <a:fld id="{8FD8EC2F-7A72-4CCF-8323-BEB40C0E66C1}" type="slidenum">
+            <a:fld id="{00E0CE3E-1932-4EDF-9A55-6457E8EA1150}" type="slidenum">
               <a:t>&lt;#&gt;</a:t>
             </a:fld>
           </a:p>
@@ -990,7 +990,7 @@
         <p:txBody>
           <a:bodyPr/>
           <a:p>
-            <a:fld id="{F383D675-F391-4EF5-9E07-B42988D08A4C}" type="slidenum">
+            <a:fld id="{B2A216B4-9C01-4740-BFEA-03F5FCBE8048}" type="slidenum">
               <a:t>&lt;#&gt;</a:t>
             </a:fld>
           </a:p>
@@ -1144,7 +1144,7 @@
         <p:txBody>
           <a:bodyPr/>
           <a:p>
-            <a:fld id="{D234F48C-4E10-4C11-AEE4-1653A7BEF6A5}" type="slidenum">
+            <a:fld id="{FD9401A1-E728-4917-A265-7F599C475108}" type="slidenum">
               <a:t>&lt;#&gt;</a:t>
             </a:fld>
           </a:p>
@@ -1332,7 +1332,7 @@
         <p:txBody>
           <a:bodyPr/>
           <a:p>
-            <a:fld id="{60FBD512-8EEA-4EAF-925C-DABA76A99511}" type="slidenum">
+            <a:fld id="{A900D387-E108-4668-853B-129D5C2034D8}" type="slidenum">
               <a:t>&lt;#&gt;</a:t>
             </a:fld>
           </a:p>
@@ -1452,7 +1452,7 @@
         <p:txBody>
           <a:bodyPr/>
           <a:p>
-            <a:fld id="{ADC016C1-5B4F-4947-AE72-70D746F3E700}" type="slidenum">
+            <a:fld id="{62121001-C841-420C-957B-640BE712752E}" type="slidenum">
               <a:t>&lt;#&gt;</a:t>
             </a:fld>
           </a:p>
@@ -1572,7 +1572,7 @@
         <p:txBody>
           <a:bodyPr/>
           <a:p>
-            <a:fld id="{D84A8EEE-1569-497D-AE61-256714DFD1FB}" type="slidenum">
+            <a:fld id="{5EBD48DA-2954-4E8C-AA98-370D3135AA07}" type="slidenum">
               <a:t>&lt;#&gt;</a:t>
             </a:fld>
           </a:p>
@@ -1794,7 +1794,7 @@
         <p:txBody>
           <a:bodyPr/>
           <a:p>
-            <a:fld id="{7C3B9442-8A2E-43B4-B45C-FA52D228DA51}" type="slidenum">
+            <a:fld id="{2735B52D-AE0F-4845-8890-43DF466E95F8}" type="slidenum">
               <a:t>&lt;#&gt;</a:t>
             </a:fld>
           </a:p>
@@ -2016,7 +2016,7 @@
         <p:txBody>
           <a:bodyPr/>
           <a:p>
-            <a:fld id="{AA563CDA-A129-456A-88D2-F9B7CC59728D}" type="slidenum">
+            <a:fld id="{8FB4358D-2C21-496F-91B4-B7AFDD2937B1}" type="slidenum">
               <a:t>&lt;#&gt;</a:t>
             </a:fld>
           </a:p>
@@ -2238,7 +2238,7 @@
         <p:txBody>
           <a:bodyPr/>
           <a:p>
-            <a:fld id="{F60370E8-19B0-4320-87C8-ED355E7FF720}" type="slidenum">
+            <a:fld id="{292ABB12-0C00-47AE-90BB-4980629448F2}" type="slidenum">
               <a:t>&lt;#&gt;</a:t>
             </a:fld>
           </a:p>
@@ -2650,7 +2650,7 @@
             <a:pPr algn="r">
               <a:buNone/>
             </a:pPr>
-            <a:fld id="{1191B2E1-7AD3-432E-897F-949AB619953E}" type="slidenum">
+            <a:fld id="{488548B7-1184-4787-B6B3-E4581F7E34DD}" type="slidenum">
               <a:rPr b="0" lang="en-US" sz="1400" spc="-1" strike="noStrike">
                 <a:latin typeface="Times New Roman"/>
               </a:rPr>
